--- a/clang-tools-extra/clangd/presentation_clangd_pseudoparser.pptx
+++ b/clang-tools-extra/clangd/presentation_clangd_pseudoparser.pptx
@@ -7384,7 +7384,7 @@
               </a:defRPr>
             </a:pPr>
             <a:r>
-              <a:t>Single-File Examples: Broken Syntax &amp; Conditional Compilation</a:t>
+              <a:t>Single-File Examples: Branch Brackets &amp; Member Definitions</a:t>
             </a:r>
           </a:p>
         </p:txBody>
@@ -7502,178 +7502,7 @@
               </a:defRPr>
             </a:pPr>
             <a:r>
-              <a:t>Example 1: Broken Syntax Mid-Function</a:t>
-            </a:r>
-          </a:p>
-          <a:p>
-            <a:pPr>
-              <a:spcAft>
-                <a:spcPts val="600"/>
-              </a:spcAft>
-            </a:pPr>
-            <a:r>
-              <a:rPr sz="850">
-                <a:solidFill>
-                  <a:srgbClr val="FBBF24"/>
-                </a:solidFill>
-                <a:latin typeface="Courier New"/>
-              </a:rPr>
-              <a:t>// Single self-contained file:
-struct DatabaseConnection {
-    void execute();
-};
-void process(int count) {
-    if (count &gt; 0 {        // &lt;- Syntax Error! Missing ')' &amp; '{'
-    DatabaseConnection db; // &lt;- CALL GTD on 'DatabaseConnection'
-    db.execute();
-}</a:t>
-            </a:r>
-          </a:p>
-          <a:p>
-            <a:pPr>
-              <a:spcAft>
-                <a:spcPts val="400"/>
-              </a:spcAft>
-            </a:pPr>
-            <a:r>
-              <a:rPr b="1" sz="1000">
-                <a:solidFill>
-                  <a:srgbClr val="38BDF8"/>
-                </a:solidFill>
-              </a:rPr>
-              <a:t>🎯 GTD Target: </a:t>
-            </a:r>
-            <a:r>
-              <a:rPr sz="1000">
-                <a:solidFill>
-                  <a:srgbClr val="F8FAFC"/>
-                </a:solidFill>
-              </a:rPr>
-              <a:t>Line 8, Col 5 ('DatabaseConnection') -&gt; Target: Line 2</a:t>
-            </a:r>
-          </a:p>
-          <a:p>
-            <a:pPr>
-              <a:spcAft>
-                <a:spcPts val="400"/>
-              </a:spcAft>
-            </a:pPr>
-            <a:r>
-              <a:rPr b="1" sz="1000">
-                <a:solidFill>
-                  <a:srgbClr val="F87171"/>
-                </a:solidFill>
-              </a:rPr>
-              <a:t>❌ Tree-sitter: </a:t>
-            </a:r>
-            <a:r>
-              <a:rPr sz="1000">
-                <a:solidFill>
-                  <a:srgbClr val="94A3B8"/>
-                </a:solidFill>
-              </a:rPr>
-              <a:t>Unclosed 'if' triggers broad (ERROR) node swallowing lines 7–10. 'DatabaseConnection' is untyped/lost -&gt; GTD FAILS (returns null).</a:t>
-            </a:r>
-          </a:p>
-          <a:p>
-            <a:r>
-              <a:rPr b="1" sz="1000">
-                <a:solidFill>
-                  <a:srgbClr val="34D399"/>
-                </a:solidFill>
-              </a:rPr>
-              <a:t>✅ Clang-Pseudo: </a:t>
-            </a:r>
-            <a:r>
-              <a:rPr sz="1000">
-                <a:solidFill>
-                  <a:srgbClr val="F8FAFC"/>
-                </a:solidFill>
-              </a:rPr>
-              <a:t>GLR isolates 'count &gt; 0 {' into an Opaque recovery node, resumes at statement boundary, parses type-specifier, and jumps to Line 2!</a:t>
-            </a:r>
-          </a:p>
-        </p:txBody>
-      </p:sp>
-      <p:sp>
-        <p:nvSpPr>
-          <p:cNvPr id="8" name="Rounded Rectangle 7"/>
-          <p:cNvSpPr/>
-          <p:nvPr/>
-        </p:nvSpPr>
-        <p:spPr>
-          <a:xfrm>
-            <a:off x="6217920" y="1371600"/>
-            <a:ext cx="5257800" cy="5029200"/>
-          </a:xfrm>
-          <a:prstGeom prst="roundRect">
-            <a:avLst/>
-          </a:prstGeom>
-          <a:solidFill>
-            <a:srgbClr val="1E293B"/>
-          </a:solidFill>
-          <a:ln>
-            <a:solidFill>
-              <a:srgbClr val="334155"/>
-            </a:solidFill>
-          </a:ln>
-        </p:spPr>
-        <p:style>
-          <a:lnRef idx="1">
-            <a:schemeClr val="accent1"/>
-          </a:lnRef>
-          <a:fillRef idx="3">
-            <a:schemeClr val="accent1"/>
-          </a:fillRef>
-          <a:effectRef idx="2">
-            <a:schemeClr val="accent1"/>
-          </a:effectRef>
-          <a:fontRef idx="minor">
-            <a:schemeClr val="lt1"/>
-          </a:fontRef>
-        </p:style>
-        <p:txBody>
-          <a:bodyPr rtlCol="0" anchor="ctr"/>
-          <a:lstStyle/>
-          <a:p>
-            <a:pPr algn="ctr"/>
-          </a:p>
-        </p:txBody>
-      </p:sp>
-      <p:sp>
-        <p:nvSpPr>
-          <p:cNvPr id="9" name="TextBox 8"/>
-          <p:cNvSpPr txBox="1"/>
-          <p:nvPr/>
-        </p:nvSpPr>
-        <p:spPr>
-          <a:xfrm>
-            <a:off x="6400800" y="1508760"/>
-            <a:ext cx="4892040" cy="4663440"/>
-          </a:xfrm>
-          <a:prstGeom prst="rect">
-            <a:avLst/>
-          </a:prstGeom>
-          <a:noFill/>
-        </p:spPr>
-        <p:txBody>
-          <a:bodyPr wrap="square">
-            <a:spAutoFit/>
-          </a:bodyPr>
-          <a:lstStyle/>
-          <a:p>
-            <a:pPr>
-              <a:spcAft>
-                <a:spcPts val="400"/>
-              </a:spcAft>
-              <a:defRPr sz="1400" b="1">
-                <a:solidFill>
-                  <a:srgbClr val="34D399"/>
-                </a:solidFill>
-              </a:defRPr>
-            </a:pPr>
-            <a:r>
-              <a:t>Example 2: Split #ifdef Across Class Head</a:t>
+              <a:t>Example 1: Split #ifdef Across Class Head</a:t>
             </a:r>
           </a:p>
           <a:p>
@@ -7748,7 +7577,7 @@
                   <a:srgbClr val="94A3B8"/>
                 </a:solidFill>
               </a:rPr>
-              <a:t>Parses #if/#else as inline tokens. Two unclosed '{' braces before #else break grammar into cascaded (ERROR) nodes -&gt; GTD FAILS completely.</a:t>
+              <a:t>Parses #if/#else as inline tokens. Competing '{' across branches creates severe bracket mismatch -&gt; cascaded (ERROR) nodes swallow declarations -&gt; GTD FAILS.</a:t>
             </a:r>
           </a:p>
           <a:p>
@@ -7766,7 +7595,182 @@
                   <a:srgbClr val="F8FAFC"/>
                 </a:solidFill>
               </a:rPr>
-              <a:t>DirectiveTree evaluates #if USE_V2, strips #else branch, and feeds clean class stream. GTD on 'DataService' -&gt; Line 5, 'sync' -&gt; Line 10!</a:t>
+              <a:t>No brace heuristics needed! DirectiveTree prunes inactive #else branch before parsing. GLR receives a perfectly balanced token stream -&gt; GTD SUCCEEDS!</a:t>
+            </a:r>
+          </a:p>
+        </p:txBody>
+      </p:sp>
+      <p:sp>
+        <p:nvSpPr>
+          <p:cNvPr id="8" name="Rounded Rectangle 7"/>
+          <p:cNvSpPr/>
+          <p:nvPr/>
+        </p:nvSpPr>
+        <p:spPr>
+          <a:xfrm>
+            <a:off x="6217920" y="1371600"/>
+            <a:ext cx="5257800" cy="5029200"/>
+          </a:xfrm>
+          <a:prstGeom prst="roundRect">
+            <a:avLst/>
+          </a:prstGeom>
+          <a:solidFill>
+            <a:srgbClr val="1E293B"/>
+          </a:solidFill>
+          <a:ln>
+            <a:solidFill>
+              <a:srgbClr val="334155"/>
+            </a:solidFill>
+          </a:ln>
+        </p:spPr>
+        <p:style>
+          <a:lnRef idx="1">
+            <a:schemeClr val="accent1"/>
+          </a:lnRef>
+          <a:fillRef idx="3">
+            <a:schemeClr val="accent1"/>
+          </a:fillRef>
+          <a:effectRef idx="2">
+            <a:schemeClr val="accent1"/>
+          </a:effectRef>
+          <a:fontRef idx="minor">
+            <a:schemeClr val="lt1"/>
+          </a:fontRef>
+        </p:style>
+        <p:txBody>
+          <a:bodyPr rtlCol="0" anchor="ctr"/>
+          <a:lstStyle/>
+          <a:p>
+            <a:pPr algn="ctr"/>
+          </a:p>
+        </p:txBody>
+      </p:sp>
+      <p:sp>
+        <p:nvSpPr>
+          <p:cNvPr id="9" name="TextBox 8"/>
+          <p:cNvSpPr txBox="1"/>
+          <p:nvPr/>
+        </p:nvSpPr>
+        <p:spPr>
+          <a:xfrm>
+            <a:off x="6400800" y="1508760"/>
+            <a:ext cx="4892040" cy="4663440"/>
+          </a:xfrm>
+          <a:prstGeom prst="rect">
+            <a:avLst/>
+          </a:prstGeom>
+          <a:noFill/>
+        </p:spPr>
+        <p:txBody>
+          <a:bodyPr wrap="square">
+            <a:spAutoFit/>
+          </a:bodyPr>
+          <a:lstStyle/>
+          <a:p>
+            <a:pPr>
+              <a:spcAft>
+                <a:spcPts val="400"/>
+              </a:spcAft>
+              <a:defRPr sz="1400" b="1">
+                <a:solidFill>
+                  <a:srgbClr val="34D399"/>
+                </a:solidFill>
+              </a:defRPr>
+            </a:pPr>
+            <a:r>
+              <a:t>Example 2: Out-of-Class Member Definition</a:t>
+            </a:r>
+          </a:p>
+          <a:p>
+            <a:pPr>
+              <a:spcAft>
+                <a:spcPts val="600"/>
+              </a:spcAft>
+            </a:pPr>
+            <a:r>
+              <a:rPr sz="850">
+                <a:solidFill>
+                  <a:srgbClr val="FBBF24"/>
+                </a:solidFill>
+                <a:latin typeface="Courier New"/>
+              </a:rPr>
+              <a:t>// Single self-contained file:
+class DataService {
+public:
+    void sync(); // Line 3: In-class declaration
+};
+// Out-of-class member definition:
+void DataService::sync() { // Line 7: Definition
+    /* do sync */
+}
+void run() {
+    DataService svc;
+    svc.sync(); // &lt;- Line 13: CALL GTD on 'sync'
+}</a:t>
+            </a:r>
+          </a:p>
+          <a:p>
+            <a:pPr>
+              <a:spcAft>
+                <a:spcPts val="400"/>
+              </a:spcAft>
+            </a:pPr>
+            <a:r>
+              <a:rPr b="1" sz="1000">
+                <a:solidFill>
+                  <a:srgbClr val="38BDF8"/>
+                </a:solidFill>
+              </a:rPr>
+              <a:t>🎯 GTD Target: </a:t>
+            </a:r>
+            <a:r>
+              <a:rPr sz="1000">
+                <a:solidFill>
+                  <a:srgbClr val="F8FAFC"/>
+                </a:solidFill>
+              </a:rPr>
+              <a:t>Line 13, Col 10 ('sync') -&gt; Definition: Line 7 (or Decl: Line 3)</a:t>
+            </a:r>
+          </a:p>
+          <a:p>
+            <a:pPr>
+              <a:spcAft>
+                <a:spcPts val="400"/>
+              </a:spcAft>
+            </a:pPr>
+            <a:r>
+              <a:rPr b="1" sz="1000">
+                <a:solidFill>
+                  <a:srgbClr val="F87171"/>
+                </a:solidFill>
+              </a:rPr>
+              <a:t>❌ Tree-sitter: </a:t>
+            </a:r>
+            <a:r>
+              <a:rPr sz="1000">
+                <a:solidFill>
+                  <a:srgbClr val="94A3B8"/>
+                </a:solidFill>
+              </a:rPr>
+              <a:t>Flat identifier queries lack syntactic scope resolution. Naively jumps to the first text match (in-class declaration) or confuses member call with constructor.</a:t>
+            </a:r>
+          </a:p>
+          <a:p>
+            <a:r>
+              <a:rPr b="1" sz="1000">
+                <a:solidFill>
+                  <a:srgbClr val="34D399"/>
+                </a:solidFill>
+              </a:rPr>
+              <a:t>✅ Clang-Pseudo: </a:t>
+            </a:r>
+            <a:r>
+              <a:rPr sz="1000">
+                <a:solidFill>
+                  <a:srgbClr val="F8FAFC"/>
+                </a:solidFill>
+              </a:rPr>
+              <a:t>isTypeContext and scope resolution differentiate qualifiers. Indexes both declaration and definition: svc.sync() jumps to definition; DataService::sync toggles to decl!</a:t>
             </a:r>
           </a:p>
         </p:txBody>
@@ -8378,7 +8382,7 @@
               </a:defRPr>
             </a:pPr>
             <a:r>
-              <a:t>CRITICAL EDGE CASE STUDY</a:t>
+              <a:t>ARCHITECTURAL ANALYSIS</a:t>
             </a:r>
           </a:p>
         </p:txBody>
@@ -8413,7 +8417,7 @@
               </a:defRPr>
             </a:pPr>
             <a:r>
-              <a:t>The Missing '}' Crisis: Context Bleeding vs. Grammar Recovery</a:t>
+              <a:t>The Bracket Dilemma: Preprocessor Branching vs. Unclosed Braces</a:t>
             </a:r>
           </a:p>
         </p:txBody>
@@ -8531,7 +8535,7 @@
               </a:defRPr>
             </a:pPr>
             <a:r>
-              <a:t>Tree-sitter: Context Bleeding (Scope Inversion)</a:t>
+              <a:t>Tree-sitter: Fragility on Real-World Brackets</a:t>
             </a:r>
           </a:p>
           <a:p>
@@ -8547,14 +8551,14 @@
                 </a:solidFill>
                 <a:latin typeface="Courier New"/>
               </a:rPr>
-              <a:t>void helper() {
+              <a:t>// 1. Competing Branch Brackets (#if / #else):
+#if USE_V2 class Svc { #else class Old { #endif
+// -&gt; Tree-sitter: Multiple unclosed '{' before #else!
+// 2. Unclosed '{' (Missing '}') in Function:
+void helper() {
     int x = 10;
 // &lt;- MISSING '}' (typing or truncated LLM output)
-struct TargetService { void execute(); };
-void run() {
-    TargetService s;
-    s.execute(); // &lt;- CALL GTD on 'TargetService'
-}</a:t>
+struct TargetService { void execute(); };</a:t>
             </a:r>
           </a:p>
           <a:p>
@@ -8570,12 +8574,12 @@
                 </a:solidFill>
                 <a:latin typeface="Courier New"/>
               </a:rPr>
-              <a:t>Tree-sitter Concrete Syntax Tree (CST):
+              <a:t>Tree-sitter CST on Missing '}':
 (function_definition name: @helper
   body: (compound_statement
     (declaration ...)
     (struct_specifier @TargetService) &lt;-- Bleeds inside!
-    (function_definition @run ...)))  &lt;-- Bleeds inside!</a:t>
+    MISSING '}'))                     &lt;-- Synthesized at EOF</a:t>
             </a:r>
           </a:p>
           <a:p>
@@ -8585,7 +8589,8 @@
                   <a:srgbClr val="F87171"/>
                 </a:solidFill>
               </a:rPr>
-              <a:t>❌ Why it breaks: </a:t>
+              <a:t>❌ Why Tree-sitter breaks:
+</a:t>
             </a:r>
             <a:r>
               <a:rPr sz="950">
@@ -8593,7 +8598,8 @@
                   <a:srgbClr val="94A3B8"/>
                 </a:solidFill>
               </a:rPr>
-              <a:t>Tree-sitter's LR parser cannot reduce compound_statement without seeing '}'. It synthesizes MISSING '}' at EOF. All subsequent global declarations are parsed as local members inside helper() -&gt; Top-level queries fail, GTD FAILS.</a:t>
+              <a:t>• Preprocessor Brackets: Treats #if/#else as AST nodes. Competing '{' across branches creates unrecoverable (ERROR) cascades.
+• Missing '}': Cannot reduce compound_statement without seeing '}'. Synthesizes '}' at EOF, causing subsequent structs to bleed inside helper() as local declarations!</a:t>
             </a:r>
           </a:p>
         </p:txBody>
@@ -8676,7 +8682,7 @@
               </a:defRPr>
             </a:pPr>
             <a:r>
-              <a:t>Clang-Pseudo: pairBrackets &amp; [recover=Brackets]</a:t>
+              <a:t>Clang-Pseudo: The Real Mechanism</a:t>
             </a:r>
           </a:p>
           <a:p>
@@ -8686,15 +8692,18 @@
               </a:spcAft>
             </a:pPr>
             <a:r>
-              <a:rPr sz="800">
+              <a:rPr sz="780">
                 <a:solidFill>
                   <a:srgbClr val="38BDF8"/>
                 </a:solidFill>
                 <a:latin typeface="Courier New"/>
               </a:rPr>
-              <a:t>Official cxx.bnf Grammar Annotation:
-compound-statement := { statement-seq_opt [recover=Brackets] }
-class-specifier    := class-head { member_opt [recover=Brackets] }</a:t>
+              <a:t>1. Branch Brackets: Solved Natively by DirectiveTree
+DirectiveTree::chooseConditionalBranches + stripDirectives
+Prunes inactive branches BEFORE bracket pairing &amp; GLR!
+2. Unclosed Braces: The Unfinished Google Bracket Pass
+cxx.bnf: compound-statement := { statement-seq_opt [recover=Brackets] }
+Bracket.cpp: FIXME: implement resolveMisplacedPairs &amp; repairBrackets</a:t>
             </a:r>
           </a:p>
           <a:p>
@@ -8709,7 +8718,7 @@
                   <a:srgbClr val="34D399"/>
                 </a:solidFill>
               </a:rPr>
-              <a:t>1. Upfront pairBrackets() Analysis:
+              <a:t>1. Preprocessor Branching (100% Native):
 </a:t>
             </a:r>
             <a:r>
@@ -8718,7 +8727,7 @@
                   <a:srgbClr val="94A3B8"/>
                 </a:solidFill>
               </a:rPr>
-              <a:t>Before GLR parsing runs, pairBrackets scans line indentations and bracket nesting. The unclosed '{' on line 1 is marked with Tok.Pair = 0 (unpaired). The parser knows upfront that this brace was left open!</a:t>
+              <a:t>Opening braces in different #if/#else branches need ZERO brace recovery heuristics! DirectiveTree strips inactive branches before pairing, guaranteeing a perfectly balanced stream entering GLR.</a:t>
             </a:r>
           </a:p>
           <a:p>
@@ -8733,7 +8742,7 @@
                   <a:srgbClr val="34D399"/>
                 </a:solidFill>
               </a:rPr>
-              <a:t>2. [recover=Brackets] Bounded Recovery:
+              <a:t>2. Unclosed '{': Why Raw GLR Needs Google's Pre-Pass:
 </a:t>
             </a:r>
             <a:r>
@@ -8742,17 +8751,17 @@
                   <a:srgbClr val="94A3B8"/>
                 </a:solidFill>
               </a:rPr>
-              <a:t>When GLR hits the unclosed '{', recover=Brackets bounds the damage. It does NOT let helper() swallow subsequent lines. It isolates helper()'s body as an Opaque node and synchronizes at declaration-seq.</a:t>
+              <a:t>Context-free grammars cannot dynamically balance missing brackets. Google designed a 3-phase bracket repair pass in Bracket.cpp, but left Phases 2 &amp; 3 as FIXME when work stopped. Without this pre-pass, raw GLR's Left.pair() is null.</a:t>
             </a:r>
           </a:p>
           <a:p>
             <a:r>
               <a:rPr b="1" sz="1000">
                 <a:solidFill>
-                  <a:srgbClr val="34D399"/>
-                </a:solidFill>
-              </a:rPr>
-              <a:t>✅ Result: </a:t>
+                  <a:srgbClr val="38BDF8"/>
+                </a:solidFill>
+              </a:rPr>
+              <a:t>💡 Takeaway: </a:t>
             </a:r>
             <a:r>
               <a:rPr sz="950">
@@ -8760,7 +8769,7 @@
                   <a:srgbClr val="F8FAFC"/>
                 </a:solidFill>
               </a:rPr>
-              <a:t>TargetService and run() remain clean, global declarations in the DAG. GTD on 'TargetService' SUCCEEDS immediately!</a:t>
+              <a:t>DirectiveTree solves real-world preprocessor branching cleanly. Completing Google's 3-phase Bracket.cpp design is the pure path to unclosed brace recovery without ad-hoc hacks.</a:t>
             </a:r>
           </a:p>
         </p:txBody>

--- a/clang-tools-extra/clangd/presentation_clangd_pseudoparser.pptx
+++ b/clang-tools-extra/clangd/presentation_clangd_pseudoparser.pptx
@@ -7384,7 +7384,7 @@
               </a:defRPr>
             </a:pPr>
             <a:r>
-              <a:t>Single-File Examples: Branch Brackets &amp; Member Definitions</a:t>
+              <a:t>Comparative Study 1: Preprocessor Resilience (Branch Brackets)</a:t>
             </a:r>
           </a:p>
         </p:txBody>
@@ -7502,7 +7502,7 @@
               </a:defRPr>
             </a:pPr>
             <a:r>
-              <a:t>Example 1: Split #ifdef Across Class Head</a:t>
+              <a:t>C++ Code with Branch Brackets (#if / #else)</a:t>
             </a:r>
           </a:p>
           <a:p>
@@ -7558,44 +7558,21 @@
             </a:r>
           </a:p>
           <a:p>
-            <a:pPr>
-              <a:spcAft>
-                <a:spcPts val="400"/>
-              </a:spcAft>
-            </a:pPr>
-            <a:r>
-              <a:rPr b="1" sz="1000">
-                <a:solidFill>
-                  <a:srgbClr val="F87171"/>
-                </a:solidFill>
-              </a:rPr>
-              <a:t>❌ Tree-sitter: </a:t>
-            </a:r>
-            <a:r>
-              <a:rPr sz="1000">
+            <a:r>
+              <a:rPr b="1" sz="950">
+                <a:solidFill>
+                  <a:srgbClr val="FBBF24"/>
+                </a:solidFill>
+              </a:rPr>
+              <a:t>⚠️ Architectural Dilemma: </a:t>
+            </a:r>
+            <a:r>
+              <a:rPr sz="950">
                 <a:solidFill>
                   <a:srgbClr val="94A3B8"/>
                 </a:solidFill>
               </a:rPr>
-              <a:t>Parses #if/#else as inline tokens. Competing '{' across branches creates severe bracket mismatch -&gt; cascaded (ERROR) nodes swallow declarations -&gt; GTD FAILS.</a:t>
-            </a:r>
-          </a:p>
-          <a:p>
-            <a:r>
-              <a:rPr b="1" sz="1000">
-                <a:solidFill>
-                  <a:srgbClr val="34D399"/>
-                </a:solidFill>
-              </a:rPr>
-              <a:t>✅ Clang-Pseudo: </a:t>
-            </a:r>
-            <a:r>
-              <a:rPr sz="1000">
-                <a:solidFill>
-                  <a:srgbClr val="F8FAFC"/>
-                </a:solidFill>
-              </a:rPr>
-              <a:t>No brace heuristics needed! DirectiveTree prunes inactive #else branch before parsing. GLR receives a perfectly balanced token stream -&gt; GTD SUCCEEDS!</a:t>
+              <a:t>Opening braces '{' appear in two competing #if / #else branches, completed by a single closing '}'. This pattern is ubiquitous in production cross-platform C++.</a:t>
             </a:r>
           </a:p>
         </p:txBody>
@@ -7669,16 +7646,16 @@
           <a:p>
             <a:pPr>
               <a:spcAft>
-                <a:spcPts val="400"/>
+                <a:spcPts val="600"/>
               </a:spcAft>
-              <a:defRPr sz="1400" b="1">
+              <a:defRPr sz="1300" b="1">
                 <a:solidFill>
                   <a:srgbClr val="34D399"/>
                 </a:solidFill>
               </a:defRPr>
             </a:pPr>
             <a:r>
-              <a:t>Example 2: Out-of-Class Member Definition</a:t>
+              <a:t>Tree-sitter Breakdown vs. Clang-Pseudo DirectiveTree</a:t>
             </a:r>
           </a:p>
           <a:p>
@@ -7688,89 +7665,44 @@
               </a:spcAft>
             </a:pPr>
             <a:r>
-              <a:rPr sz="850">
-                <a:solidFill>
-                  <a:srgbClr val="FBBF24"/>
-                </a:solidFill>
-                <a:latin typeface="Courier New"/>
-              </a:rPr>
-              <a:t>// Single self-contained file:
-class DataService {
-public:
-    void sync(); // Line 3: In-class declaration
-};
-// Out-of-class member definition:
-void DataService::sync() { // Line 7: Definition
-    /* do sync */
-}
-void run() {
-    DataService svc;
-    svc.sync(); // &lt;- Line 13: CALL GTD on 'sync'
-}</a:t>
-            </a:r>
-          </a:p>
-          <a:p>
-            <a:pPr>
-              <a:spcAft>
-                <a:spcPts val="400"/>
-              </a:spcAft>
-            </a:pPr>
-            <a:r>
               <a:rPr b="1" sz="1000">
                 <a:solidFill>
-                  <a:srgbClr val="38BDF8"/>
-                </a:solidFill>
-              </a:rPr>
-              <a:t>🎯 GTD Target: </a:t>
-            </a:r>
-            <a:r>
-              <a:rPr sz="1000">
+                  <a:srgbClr val="F87171"/>
+                </a:solidFill>
+              </a:rPr>
+              <a:t>❌ Tree-sitter: Flat AST Breakdown (No Heuristic Fix)
+</a:t>
+            </a:r>
+            <a:r>
+              <a:rPr sz="950">
+                <a:solidFill>
+                  <a:srgbClr val="94A3B8"/>
+                </a:solidFill>
+              </a:rPr>
+              <a:t>• Inline Directives: Parses #if and #else as ordinary syntax nodes within a single flat buffer.
+• Severe Bracket Mismatch: The two unclosed '{' before #else corrupt the LR state machine. It cascades into broad (ERROR) nodes across lines 6–16.
+• GTD FAILS: Drops 'DataService' and 'sync()' entirely. Flat regex or indentation heuristics cannot know which branch is active without preprocessing.</a:t>
+            </a:r>
+          </a:p>
+          <a:p>
+            <a:r>
+              <a:rPr b="1" sz="1000">
+                <a:solidFill>
+                  <a:srgbClr val="34D399"/>
+                </a:solidFill>
+              </a:rPr>
+              <a:t>✅ Clang-Pseudo: Native DirectiveTree Branch Pruning
+</a:t>
+            </a:r>
+            <a:r>
+              <a:rPr sz="950">
                 <a:solidFill>
                   <a:srgbClr val="F8FAFC"/>
                 </a:solidFill>
               </a:rPr>
-              <a:t>Line 13, Col 10 ('sync') -&gt; Definition: Line 7 (or Decl: Line 3)</a:t>
-            </a:r>
-          </a:p>
-          <a:p>
-            <a:pPr>
-              <a:spcAft>
-                <a:spcPts val="400"/>
-              </a:spcAft>
-            </a:pPr>
-            <a:r>
-              <a:rPr b="1" sz="1000">
-                <a:solidFill>
-                  <a:srgbClr val="F87171"/>
-                </a:solidFill>
-              </a:rPr>
-              <a:t>❌ Tree-sitter: </a:t>
-            </a:r>
-            <a:r>
-              <a:rPr sz="1000">
-                <a:solidFill>
-                  <a:srgbClr val="94A3B8"/>
-                </a:solidFill>
-              </a:rPr>
-              <a:t>Flat identifier queries lack syntactic scope resolution. Naively jumps to the first text match (in-class declaration) or confuses member call with constructor.</a:t>
-            </a:r>
-          </a:p>
-          <a:p>
-            <a:r>
-              <a:rPr b="1" sz="1000">
-                <a:solidFill>
-                  <a:srgbClr val="34D399"/>
-                </a:solidFill>
-              </a:rPr>
-              <a:t>✅ Clang-Pseudo: </a:t>
-            </a:r>
-            <a:r>
-              <a:rPr sz="1000">
-                <a:solidFill>
-                  <a:srgbClr val="F8FAFC"/>
-                </a:solidFill>
-              </a:rPr>
-              <a:t>isTypeContext and scope resolution differentiate qualifiers. Indexes both declaration and definition: svc.sync() jumps to definition; DataService::sync toggles to decl!</a:t>
+              <a:t>• DirectiveTree Pre-Pass: Evaluates #if USE_V2 and prunes the untaken #else branch BEFORE token pairing and GLR parsing.
+• Pure Token Stream: The GLR parser receives a single, perfectly balanced '{' and '}' stream.
+• Zero Brace Recovery Heuristics: 100% native standard grammar parsing. GTD jumps to Line 5 and Line 10 with compiler precision!</a:t>
             </a:r>
           </a:p>
         </p:txBody>
@@ -7866,7 +7798,7 @@
               </a:defRPr>
             </a:pPr>
             <a:r>
-              <a:t>SELF-CONTAINED STUDIES</a:t>
+              <a:t>C++20 CONCEPTS &amp; TEMPLATES</a:t>
             </a:r>
           </a:p>
         </p:txBody>
@@ -7901,7 +7833,7 @@
               </a:defRPr>
             </a:pPr>
             <a:r>
-              <a:t>Single-File Examples: Scope Disambiguation &amp; Framework Macros</a:t>
+              <a:t>Comparative Study 2: ISO Grammar vs. Handcrafted DSL</a:t>
             </a:r>
           </a:p>
         </p:txBody>
@@ -8019,7 +7951,7 @@
               </a:defRPr>
             </a:pPr>
             <a:r>
-              <a:t>Example 3: Qualified Class vs. Constructor</a:t>
+              <a:t>Valid Standard C++20 (ISO C++ N4860)</a:t>
             </a:r>
           </a:p>
           <a:p>
@@ -8029,26 +7961,27 @@
               </a:spcAft>
             </a:pPr>
             <a:r>
-              <a:rPr sz="850">
+              <a:rPr sz="800">
                 <a:solidFill>
                   <a:srgbClr val="FBBF24"/>
                 </a:solidFill>
                 <a:latin typeface="Courier New"/>
               </a:rPr>
               <a:t>// Single self-contained file:
-class Server {
+template &lt;typename T&gt;
+concept Serializable = requires(T x) {
+    x.serialize();
+};
+template &lt;Serializable T&gt;
+class DataPipeline {
 public:
-    Server(int port); // Line 4: Constructor declaration
-    void start();     // Line 5: Method declaration
+    void process(T data);
 };
-// Method implementation:
-void Server::start() { // &lt;- Line 9: CALL GTD on first 'Server'
-    /* ... */
+void run() {
+    DataPipeline&lt;int&gt; pipeline; // &lt;- CALL GTD
+    pipeline.process(42);
 }
-// Constructor definition:
-Server::Server(int port) { // Line 14: Constructor definition
-    /* ... */
-}</a:t>
+// In template head: CALL GTD on 'Serializable'</a:t>
             </a:r>
           </a:p>
           <a:p>
@@ -8063,56 +7996,35 @@
                   <a:srgbClr val="38BDF8"/>
                 </a:solidFill>
               </a:rPr>
-              <a:t>🎯 GTD Target: </a:t>
-            </a:r>
-            <a:r>
-              <a:rPr sz="1000">
+              <a:t>🎯 GTD Targets: </a:t>
+            </a:r>
+            <a:r>
+              <a:rPr sz="950">
                 <a:solidFill>
                   <a:srgbClr val="F8FAFC"/>
                 </a:solidFill>
               </a:rPr>
-              <a:t>Line 9, Col 6 (first 'Server' in 'void Server::start()') -&gt; Line 2</a:t>
-            </a:r>
-          </a:p>
-          <a:p>
-            <a:pPr>
-              <a:spcAft>
-                <a:spcPts val="400"/>
-              </a:spcAft>
-            </a:pPr>
-            <a:r>
-              <a:rPr b="1" sz="1000">
-                <a:solidFill>
-                  <a:srgbClr val="F87171"/>
-                </a:solidFill>
-              </a:rPr>
-              <a:t>❌ Tree-sitter: </a:t>
-            </a:r>
-            <a:r>
-              <a:rPr sz="1000">
+              <a:t>
+• Line 14 ('DataPipeline') -&gt; Line 8 (Class declaration)
+• Line 7 ('Serializable') -&gt; Line 3 (Concept definition)</a:t>
+            </a:r>
+          </a:p>
+          <a:p>
+            <a:r>
+              <a:rPr b="1" sz="950">
+                <a:solidFill>
+                  <a:srgbClr val="38BDF8"/>
+                </a:solidFill>
+              </a:rPr>
+              <a:t>💡 Formal Language Reality: </a:t>
+            </a:r>
+            <a:r>
+              <a:rPr sz="950">
                 <a:solidFill>
                   <a:srgbClr val="94A3B8"/>
                 </a:solidFill>
               </a:rPr>
-              <a:t>Both tokens are coarse 'identifier's. Symbol search finds the definition on Line 14 first and ERRONEOUSLY jumps to the constructor on Line 14!</a:t>
-            </a:r>
-          </a:p>
-          <a:p>
-            <a:r>
-              <a:rPr b="1" sz="1000">
-                <a:solidFill>
-                  <a:srgbClr val="34D399"/>
-                </a:solidFill>
-              </a:rPr>
-              <a:t>✅ Clang-Pseudo: </a:t>
-            </a:r>
-            <a:r>
-              <a:rPr sz="1000">
-                <a:solidFill>
-                  <a:srgbClr val="F8FAFC"/>
-                </a:solidFill>
-              </a:rPr>
-              <a:t>isTypeContext identifies '::' -&gt; Type context. It knows constructors cannot be types, skips Line 14, and jumps accurately to 'class Server' on Line 2!</a:t>
+              <a:t>concept definitions, requires expressions, and constrained template parameter heads (type-constraint) are standard C++20 grammar constructs.</a:t>
             </a:r>
           </a:p>
         </p:txBody>
@@ -8186,16 +8098,16 @@
           <a:p>
             <a:pPr>
               <a:spcAft>
-                <a:spcPts val="400"/>
+                <a:spcPts val="600"/>
               </a:spcAft>
-              <a:defRPr sz="1400" b="1">
+              <a:defRPr sz="1300" b="1">
                 <a:solidFill>
                   <a:srgbClr val="34D399"/>
                 </a:solidFill>
               </a:defRPr>
             </a:pPr>
             <a:r>
-              <a:t>Example 4: Declaration-Generating Macros</a:t>
+              <a:t>Handcrafted DSL vs. Official ISO C++ BNF</a:t>
             </a:r>
           </a:p>
           <a:p>
@@ -8205,88 +8117,46 @@
               </a:spcAft>
             </a:pPr>
             <a:r>
-              <a:rPr sz="800">
-                <a:solidFill>
-                  <a:srgbClr val="FBBF24"/>
-                </a:solidFill>
-                <a:latin typeface="Courier New"/>
-              </a:rPr>
-              <a:t>// Single self-contained file:
-// Macro without trailing semicolon (like Qt Q_OBJECT / LLVM macros):
-#define DECLARE_SERVICE(Name) \
-public: static const char* id() { return #Name; } private:
-class AuthManager {
-    DECLARE_SERVICE(AuthManager) // &lt;- Line 7: No semicolon!
-public:
-    void authenticate();         // Line 9: Target declaration
-};
-void handleLogin(AuthManager* mgr) {
-    mgr-&gt;authenticate();         // &lt;- Line 13: CALL GTD on 'authenticate'
-}</a:t>
-            </a:r>
-          </a:p>
-          <a:p>
-            <a:pPr>
-              <a:spcAft>
-                <a:spcPts val="400"/>
-              </a:spcAft>
-            </a:pPr>
-            <a:r>
               <a:rPr b="1" sz="1000">
                 <a:solidFill>
-                  <a:srgbClr val="38BDF8"/>
-                </a:solidFill>
-              </a:rPr>
-              <a:t>🎯 GTD Target: </a:t>
-            </a:r>
-            <a:r>
-              <a:rPr sz="1000">
+                  <a:srgbClr val="F87171"/>
+                </a:solidFill>
+              </a:rPr>
+              <a:t>❌ Tree-sitter: Handcrafted DSL Approximation (grammar.js)
+</a:t>
+            </a:r>
+            <a:r>
+              <a:rPr sz="950">
+                <a:solidFill>
+                  <a:srgbClr val="94A3B8"/>
+                </a:solidFill>
+              </a:rPr>
+              <a:t>• Missing ISO Productions: grammar.js is handwritten in JS. It lacks standard C++20 type-constraint parameter heads (template &lt;Serializable T&gt;), expecting only typename T or class T.
+• Shift/Reduce Collision: { x.serialize(); } inside requires clashes with compound statement blocks.
+• Synthesizes (ERROR): Mangles the template signature and drops concept definition -&gt; GTD on 'Serializable' and 'DataPipeline' FAILS!</a:t>
+            </a:r>
+          </a:p>
+          <a:p>
+            <a:r>
+              <a:rPr b="1" sz="1000">
+                <a:solidFill>
+                  <a:srgbClr val="34D399"/>
+                </a:solidFill>
+              </a:rPr>
+              <a:t>✅ Clang-Pseudo: Strict ISO C++ BNF Standard (cxx.bnf)
+</a:t>
+            </a:r>
+            <a:r>
+              <a:rPr sz="950">
                 <a:solidFill>
                   <a:srgbClr val="F8FAFC"/>
                 </a:solidFill>
               </a:rPr>
-              <a:t>Line 13, Col 10 ('authenticate') -&gt; Target: Line 9</a:t>
-            </a:r>
-          </a:p>
-          <a:p>
-            <a:pPr>
-              <a:spcAft>
-                <a:spcPts val="400"/>
-              </a:spcAft>
-            </a:pPr>
-            <a:r>
-              <a:rPr b="1" sz="1000">
-                <a:solidFill>
-                  <a:srgbClr val="F87171"/>
-                </a:solidFill>
-              </a:rPr>
-              <a:t>❌ Tree-sitter: </a:t>
-            </a:r>
-            <a:r>
-              <a:rPr sz="1000">
-                <a:solidFill>
-                  <a:srgbClr val="94A3B8"/>
-                </a:solidFill>
-              </a:rPr>
-              <a:t>Macro without semicolon breaks grammar rules in class body. Corrupts subsequent 'public:' and drops 'authenticate()' from symbols -&gt; GTD FAILS.</a:t>
-            </a:r>
-          </a:p>
-          <a:p>
-            <a:r>
-              <a:rPr b="1" sz="1000">
-                <a:solidFill>
-                  <a:srgbClr val="34D399"/>
-                </a:solidFill>
-              </a:rPr>
-              <a:t>✅ Clang-Pseudo: </a:t>
-            </a:r>
-            <a:r>
-              <a:rPr sz="1000">
-                <a:solidFill>
-                  <a:srgbClr val="F8FAFC"/>
-                </a:solidFill>
-              </a:rPr>
-              <a:t>GLR wraps unknown macro token into an Opaque node, preserving class body boundaries. Cleanly indexes 'authenticate()' and jumps to Line 9!</a:t>
+              <a:t>• Official ISO C++20 Grammar: Compiled from N4860 draft with exact productions:
+  concept-definition := CONCEPT concept-name = constraint-expression ;
+  type-parameter := type-constraint ..._opt IDENTIFIER_opt
+• 1st-Class Symbol Indexing: Indexes concept as SymbolKind::Interface and DeclKind::Concept.
+• Flawless Navigation: Accurately jumps to both the concept definition and the template class!</a:t>
             </a:r>
           </a:p>
         </p:txBody>

--- a/clang-tools-extra/clangd/presentation_clangd_pseudoparser.pptx
+++ b/clang-tools-extra/clangd/presentation_clangd_pseudoparser.pptx
@@ -6674,7 +6674,7 @@
               </a:defRPr>
             </a:pPr>
             <a:r>
-              <a:t>Precise DeclKind Classification &amp; Include BFS</a:t>
+              <a:t>Precise DeclKind Declaration Classification</a:t>
             </a:r>
           </a:p>
           <a:p>
@@ -6715,7 +6715,7 @@
                   <a:srgbClr val="F8FAFC"/>
                 </a:solidFill>
               </a:rPr>
-              <a:t>Clang-Pseudo grammar maps directly to DeclKind (Class, Struct, Enum, Typedef, Namespace), powering bounded header BFS for instant cross-file Go-To-Definition.</a:t>
+              <a:t>Clang-Pseudo grammar maps directly to DeclKind (Class, Struct, Enum, Typedef, Namespace) — native typed classification directly from grammar rules.</a:t>
             </a:r>
           </a:p>
         </p:txBody>
@@ -6811,7 +6811,7 @@
               </a:defRPr>
             </a:pPr>
             <a:r>
-              <a:t>AI AGENT &amp; RAG ADVANTAGE</a:t>
+              <a:t>AI AGENT &amp; TOOLING COMPARISON</a:t>
             </a:r>
           </a:p>
         </p:txBody>
@@ -6939,8 +6939,8 @@
         </p:nvSpPr>
         <p:spPr>
           <a:xfrm>
-            <a:off x="914400" y="1554480"/>
-            <a:ext cx="4892040" cy="1965960"/>
+            <a:off x="914400" y="1508760"/>
+            <a:ext cx="4892040" cy="2057400"/>
           </a:xfrm>
           <a:prstGeom prst="rect">
             <a:avLst/>
@@ -6955,26 +6955,57 @@
           <a:p>
             <a:pPr>
               <a:spcAft>
-                <a:spcPts val="800"/>
-              </a:spcAft>
-              <a:defRPr sz="1400" b="1">
+                <a:spcPts val="600"/>
+              </a:spcAft>
+              <a:defRPr sz="1300" b="1">
                 <a:solidFill>
                   <a:srgbClr val="38BDF8"/>
                 </a:solidFill>
               </a:defRPr>
             </a:pPr>
             <a:r>
-              <a:t>1. Formally Correct Syntax Gating</a:t>
-            </a:r>
-          </a:p>
-          <a:p>
-            <a:r>
-              <a:rPr sz="1150">
+              <a:t>Streaming Syntax Gating (Validation)</a:t>
+            </a:r>
+          </a:p>
+          <a:p>
+            <a:pPr>
+              <a:spcAft>
+                <a:spcPts val="400"/>
+              </a:spcAft>
+            </a:pPr>
+            <a:r>
+              <a:rPr b="1" sz="1100">
+                <a:solidFill>
+                  <a:srgbClr val="F87171"/>
+                </a:solidFill>
+              </a:rPr>
+              <a:t>Tree-sitter: </a:t>
+            </a:r>
+            <a:r>
+              <a:rPr sz="1100">
                 <a:solidFill>
                   <a:srgbClr val="94A3B8"/>
                 </a:solidFill>
               </a:rPr>
-              <a:t>For streaming LLM code generation and speculative decoding. Tree-sitter's approximate grammar silently accepts invalid C++ or rejects advanced valid C++ (concepts, requires clauses). Clang-Pseudo provides strict ISO syntax validation in &lt;10ms without headers.</a:t>
+              <a:t>Handcrafted approximate grammar (grammar.js) silently accepts malformed C++ or falsely rejects valid C++20 constructs.</a:t>
+            </a:r>
+          </a:p>
+          <a:p>
+            <a:r>
+              <a:rPr b="1" sz="1100">
+                <a:solidFill>
+                  <a:srgbClr val="34D399"/>
+                </a:solidFill>
+              </a:rPr>
+              <a:t>Clang-Pseudo: </a:t>
+            </a:r>
+            <a:r>
+              <a:rPr sz="1100">
+                <a:solidFill>
+                  <a:srgbClr val="F8FAFC"/>
+                </a:solidFill>
+              </a:rPr>
+              <a:t>Strict ISO standard BNF (N4860) validates syntax with 100% formal language fidelity — zero false rejections during constrained decoding.</a:t>
             </a:r>
           </a:p>
         </p:txBody>
@@ -7032,8 +7063,8 @@
         </p:nvSpPr>
         <p:spPr>
           <a:xfrm>
-            <a:off x="6355080" y="1554480"/>
-            <a:ext cx="4892040" cy="1965960"/>
+            <a:off x="6355080" y="1508760"/>
+            <a:ext cx="4892040" cy="2057400"/>
           </a:xfrm>
           <a:prstGeom prst="rect">
             <a:avLst/>
@@ -7048,26 +7079,57 @@
           <a:p>
             <a:pPr>
               <a:spcAft>
-                <a:spcPts val="800"/>
-              </a:spcAft>
-              <a:defRPr sz="1400" b="1">
+                <a:spcPts val="600"/>
+              </a:spcAft>
+              <a:defRPr sz="1300" b="1">
                 <a:solidFill>
                   <a:srgbClr val="34D399"/>
                 </a:solidFill>
               </a:defRPr>
             </a:pPr>
             <a:r>
-              <a:t>2. High-Density AST Skeletonization for RAG</a:t>
-            </a:r>
-          </a:p>
-          <a:p>
-            <a:r>
-              <a:rPr sz="1150">
+              <a:t>Lossless AST Skeletonization (RAG)</a:t>
+            </a:r>
+          </a:p>
+          <a:p>
+            <a:pPr>
+              <a:spcAft>
+                <a:spcPts val="400"/>
+              </a:spcAft>
+            </a:pPr>
+            <a:r>
+              <a:rPr b="1" sz="1100">
+                <a:solidFill>
+                  <a:srgbClr val="F87171"/>
+                </a:solidFill>
+              </a:rPr>
+              <a:t>Tree-sitter: </a:t>
+            </a:r>
+            <a:r>
+              <a:rPr sz="1100">
                 <a:solidFill>
                   <a:srgbClr val="94A3B8"/>
                 </a:solidFill>
               </a:rPr>
-              <a:t>LLM context windows are expensive. Clang-Pseudo extracts exact class, template, and function signatures in 50ms while stripping function bodies — packing 10x more repository interface context into prompts with zero compiler setup.</a:t>
+              <a:t>Simplified grammar misparses templates and concepts; fragile S-expression queries break and drop nested type signatures.</a:t>
+            </a:r>
+          </a:p>
+          <a:p>
+            <a:r>
+              <a:rPr b="1" sz="1100">
+                <a:solidFill>
+                  <a:srgbClr val="34D399"/>
+                </a:solidFill>
+              </a:rPr>
+              <a:t>Clang-Pseudo: </a:t>
+            </a:r>
+            <a:r>
+              <a:rPr sz="1100">
+                <a:solidFill>
+                  <a:srgbClr val="F8FAFC"/>
+                </a:solidFill>
+              </a:rPr>
+              <a:t>Lossless signature extraction strips function bodies while preserving complete ISO types, concepts, and member scopes for prompts.</a:t>
             </a:r>
           </a:p>
         </p:txBody>
@@ -7125,8 +7187,8 @@
         </p:nvSpPr>
         <p:spPr>
           <a:xfrm>
-            <a:off x="914400" y="4069080"/>
-            <a:ext cx="4892040" cy="1965960"/>
+            <a:off x="914400" y="4023360"/>
+            <a:ext cx="4892040" cy="2057400"/>
           </a:xfrm>
           <a:prstGeom prst="rect">
             <a:avLst/>
@@ -7141,26 +7203,57 @@
           <a:p>
             <a:pPr>
               <a:spcAft>
-                <a:spcPts val="800"/>
-              </a:spcAft>
-              <a:defRPr sz="1400" b="1">
+                <a:spcPts val="600"/>
+              </a:spcAft>
+              <a:defRPr sz="1300" b="1">
                 <a:solidFill>
                   <a:srgbClr val="FBBF24"/>
                 </a:solidFill>
               </a:defRPr>
             </a:pPr>
             <a:r>
-              <a:t>3. 70x Faster Feedback Loops for Coding Agents</a:t>
-            </a:r>
-          </a:p>
-          <a:p>
-            <a:r>
-              <a:rPr sz="1150">
+              <a:t>Symbol &amp; Scope Classification (DeclKind)</a:t>
+            </a:r>
+          </a:p>
+          <a:p>
+            <a:pPr>
+              <a:spcAft>
+                <a:spcPts val="400"/>
+              </a:spcAft>
+            </a:pPr>
+            <a:r>
+              <a:rPr b="1" sz="1100">
+                <a:solidFill>
+                  <a:srgbClr val="F87171"/>
+                </a:solidFill>
+              </a:rPr>
+              <a:t>Tree-sitter: </a:t>
+            </a:r>
+            <a:r>
+              <a:rPr sz="1100">
                 <a:solidFill>
                   <a:srgbClr val="94A3B8"/>
                 </a:solidFill>
               </a:rPr>
-              <a:t>Autonomous coding agents (Cursor, Claude Code, Antigravity) make multi-step code edits. Waiting 3.6–10s per edit for AST rebuild stalls agent execution. Clang-Pseudo validates modified scopes in 50ms instead of 3,600ms.</a:t>
+              <a:t>Emits coarse, ambiguous node types (type_identifier); cannot reliably classify classes, concepts, or typedefs without fragile ad-hoc queries.</a:t>
+            </a:r>
+          </a:p>
+          <a:p>
+            <a:r>
+              <a:rPr b="1" sz="1100">
+                <a:solidFill>
+                  <a:srgbClr val="34D399"/>
+                </a:solidFill>
+              </a:rPr>
+              <a:t>Clang-Pseudo: </a:t>
+            </a:r>
+            <a:r>
+              <a:rPr sz="1100">
+                <a:solidFill>
+                  <a:srgbClr val="F8FAFC"/>
+                </a:solidFill>
+              </a:rPr>
+              <a:t>Maps AST nodes directly to formal DeclKind (Class, Struct, Enum, Concept, Namespace) — exact syntactic taxonomy for AI tools.</a:t>
             </a:r>
           </a:p>
         </p:txBody>
@@ -7218,8 +7311,8 @@
         </p:nvSpPr>
         <p:spPr>
           <a:xfrm>
-            <a:off x="6355080" y="4069080"/>
-            <a:ext cx="4892040" cy="1965960"/>
+            <a:off x="6355080" y="4023360"/>
+            <a:ext cx="4892040" cy="2057400"/>
           </a:xfrm>
           <a:prstGeom prst="rect">
             <a:avLst/>
@@ -7234,26 +7327,57 @@
           <a:p>
             <a:pPr>
               <a:spcAft>
-                <a:spcPts val="800"/>
-              </a:spcAft>
-              <a:defRPr sz="1400" b="1">
+                <a:spcPts val="600"/>
+              </a:spcAft>
+              <a:defRPr sz="1300" b="1">
                 <a:solidFill>
                   <a:srgbClr val="C084FC"/>
                 </a:solidFill>
               </a:defRPr>
             </a:pPr>
             <a:r>
-              <a:t>4. Clean Monorepo Indexing at Scale</a:t>
-            </a:r>
-          </a:p>
-          <a:p>
-            <a:r>
-              <a:rPr sz="1150">
+              <a:t>Monorepo Vector Indexing Resilience</a:t>
+            </a:r>
+          </a:p>
+          <a:p>
+            <a:pPr>
+              <a:spcAft>
+                <a:spcPts val="400"/>
+              </a:spcAft>
+            </a:pPr>
+            <a:r>
+              <a:rPr b="1" sz="1100">
+                <a:solidFill>
+                  <a:srgbClr val="F87171"/>
+                </a:solidFill>
+              </a:rPr>
+              <a:t>Tree-sitter: </a:t>
+            </a:r>
+            <a:r>
+              <a:rPr sz="1100">
                 <a:solidFill>
                   <a:srgbClr val="94A3B8"/>
                 </a:solidFill>
               </a:rPr>
-              <a:t>Codebases like Chromium or Linux kernel break Tree-sitter with (ERROR) nodes on ~20% of files due to complex #ifdefs. DirectiveTree yields clean, complete parse trees across millions of files, generating reliable semantic chunks for vector search.</a:t>
+              <a:t>Inlines #ifdefs as syntax nodes; competing branch brackets trigger cascaded (ERROR) nodes across ~20% of files, mangling chunks.</a:t>
+            </a:r>
+          </a:p>
+          <a:p>
+            <a:r>
+              <a:rPr b="1" sz="1100">
+                <a:solidFill>
+                  <a:srgbClr val="34D399"/>
+                </a:solidFill>
+              </a:rPr>
+              <a:t>Clang-Pseudo: </a:t>
+            </a:r>
+            <a:r>
+              <a:rPr sz="1100">
+                <a:solidFill>
+                  <a:srgbClr val="F8FAFC"/>
+                </a:solidFill>
+              </a:rPr>
+              <a:t>DirectiveTree branch pruning resolves conditional branches cleanly before GLR parsing — pristine chunk boundaries for embeddings.</a:t>
             </a:r>
           </a:p>
         </p:txBody>
